--- a/events/sls-annual-assembly-2026/SLS_Annual_Assembly_2026_Event_Charter.pptx
+++ b/events/sls-annual-assembly-2026/SLS_Annual_Assembly_2026_Event_Charter.pptx
@@ -10319,7 +10319,7 @@
                           <a:latin typeface="Codec Pro"/>
                           <a:cs typeface="Arial" panose="020B0604020202020204" pitchFamily="34" charset="0"/>
                         </a:rPr>
-                        <a:t>2030 Leaders graduation</a:t>
+                        <a:t>Fellowship &amp; 2030 Leaders</a:t>
                       </a:r>
                     </a:p>
                   </a:txBody>
@@ -11211,7 +11211,7 @@
                           <a:ea typeface="+mn-ea"/>
                           <a:cs typeface="Arial" panose="020B0604020202020204" pitchFamily="34" charset="0"/>
                         </a:rPr>
-                        <a:t>Annual convening of the full SLS membership under the Leadership Track.</a:t>
+                        <a:t>One-day annual assembly for the full SLS membership. No graduation segment in 2026.</a:t>
                       </a:r>
                     </a:p>
                     <a:p>
@@ -11242,7 +11242,7 @@
                           <a:ea typeface="+mn-ea"/>
                           <a:cs typeface="Arial" panose="020B0604020202020204" pitchFamily="34" charset="0"/>
                         </a:rPr>
-                        <a:t>The 2026 edition gathers the community at the Hena Experience Center, Riyadh, for one afternoon-to-evening programme of plenary content, recognition and structured networking. All members are invited and around 400 are expected to attend.</a:t>
+                        <a:t>Members convene at the Hena Experience Center, Riyadh, for impact showcases, peer advisory circles, keynote dialogues, the Council roadmap and the induction of new members, with an interactive network graph running as the spine of the day.</a:t>
                       </a:r>
                     </a:p>
                   </a:txBody>
@@ -12089,7 +12089,7 @@
                       <a:r>
                         <a:rPr lang="en-US" sz="900" b="0" i="0" u="none" strike="noStrike" kern="1200" dirty="0">
                           <a:solidFill>
-                            <a:schemeClr val="bg1"/>
+                            <a:srgbClr val="737373"/>
                           </a:solidFill>
                           <a:effectLst/>
                           <a:latin typeface="Codec Pro"/>
@@ -12411,7 +12411,7 @@
                       <a:r>
                         <a:rPr lang="en-US" sz="900" b="0" i="0" u="none" strike="noStrike" kern="1200" dirty="0">
                           <a:solidFill>
-                            <a:schemeClr val="bg1"/>
+                            <a:srgbClr val="737373"/>
                           </a:solidFill>
                           <a:effectLst/>
                           <a:latin typeface="Codec Pro"/>
@@ -12721,7 +12721,7 @@
                       <a:r>
                         <a:rPr lang="en-US" sz="900" b="0" i="0" u="none" strike="noStrike" kern="1200" dirty="0">
                           <a:solidFill>
-                            <a:schemeClr val="bg1"/>
+                            <a:srgbClr val="737373"/>
                           </a:solidFill>
                           <a:effectLst/>
                           <a:latin typeface="Codec Pro"/>
@@ -13603,7 +13603,7 @@
                           <a:ea typeface="+mn-ea"/>
                           <a:cs typeface="Arial" panose="020B0604020202020204" pitchFamily="34" charset="0"/>
                         </a:rPr>
-                        <a:t>16:00 - 21:30</a:t>
+                        <a:t>14:30 - 21:00</a:t>
                       </a:r>
                       <a:endParaRPr lang="en-US" sz="900" b="0" i="0" u="none" strike="noStrike" kern="1200">
                         <a:solidFill>
@@ -14520,7 +14520,7 @@
                           <a:ea typeface="+mn-ea"/>
                           <a:cs typeface="Arial" panose="020B0604020202020204" pitchFamily="34" charset="0"/>
                         </a:rPr>
-                        <a:t>Convene the full SLS membership in one place and reinforce it as a single, active community.</a:t>
+                        <a:t>Convene the full SLS membership for one day and turn the society's network into something members actively use.</a:t>
                       </a:r>
                     </a:p>
                     <a:p>
@@ -14551,7 +14551,7 @@
                           <a:ea typeface="+mn-ea"/>
                           <a:cs typeface="Arial" panose="020B0604020202020204" pitchFamily="34" charset="0"/>
                         </a:rPr>
-                        <a:t>Make networking a designed part of the programme, set out the Track's year and its 2027 agenda, and beat the 2024 benchmarks: satisfaction of 85% or better (2024: 77%) and 85% of confirmed guests attending (2024: 320 of 468 registrants).</a:t>
+                        <a:t>Make connection the measurable outcome: three or more new introductions logged per member on the network graph, satisfaction of 85% or better (2024: 77%) and 85% of confirmed guests attending (2024: 320 of 468).</a:t>
                       </a:r>
                     </a:p>
                   </a:txBody>
@@ -14859,6 +14859,86 @@
                           <a:ea typeface="+mn-ea"/>
                           <a:cs typeface="Arial" panose="020B0604020202020204" pitchFamily="34" charset="0"/>
                         </a:rPr>
+                        <a:t>Digital: network graph wall, member app, badge scan to node, live voting, introduction ledger</a:t>
+                      </a:r>
+                      <a:endParaRPr lang="en-US" sz="800" b="0" i="0" u="none" strike="noStrike" kern="1200" spc="0">
+                        <a:solidFill>
+                          <a:srgbClr val="585858"/>
+                        </a:solidFill>
+                        <a:effectLst/>
+                        <a:latin typeface="Codec Pro"/>
+                        <a:ea typeface="+mn-ea"/>
+                        <a:cs typeface="Arial" panose="020B0604020202020204" pitchFamily="34" charset="0"/>
+                      </a:endParaRPr>
+                    </a:p>
+                    <a:p>
+                      <a:pPr marL="700405" lvl="2" indent="-171450" algn="l" defTabSz="914400" rtl="0" eaLnBrk="1" fontAlgn="ctr" latinLnBrk="0" hangingPunct="1">
+                        <a:lnSpc>
+                          <a:spcPct val="100000"/>
+                        </a:lnSpc>
+                        <a:spcBef>
+                          <a:spcPts val="0"/>
+                        </a:spcBef>
+                        <a:spcAft>
+                          <a:spcPts val="0"/>
+                        </a:spcAft>
+                        <a:buClr>
+                          <a:srgbClr val="737373"/>
+                        </a:buClr>
+                        <a:buSzPct val="100000"/>
+                        <a:buFont typeface="Arial" panose="020B0604020202020204" pitchFamily="34" charset="0"/>
+                        <a:buChar char="•"/>
+                      </a:pPr>
+                      <a:r>
+                        <a:rPr lang="en-US" sz="800" b="0" i="0" u="none" strike="noStrike" kern="1200" spc="0">
+                          <a:solidFill>
+                            <a:srgbClr val="585858"/>
+                          </a:solidFill>
+                          <a:effectLst/>
+                          <a:latin typeface="Codec Pro"/>
+                          <a:ea typeface="+mn-ea"/>
+                          <a:cs typeface="Arial" panose="020B0604020202020204" pitchFamily="34" charset="0"/>
+                        </a:rPr>
+                        <a:t>Connectivity: bonded internet with failover, touch screens, on-site technical support</a:t>
+                      </a:r>
+                      <a:endParaRPr lang="en-US" sz="800" b="0" i="0" u="none" strike="noStrike" kern="1200" spc="0">
+                        <a:solidFill>
+                          <a:srgbClr val="585858"/>
+                        </a:solidFill>
+                        <a:effectLst/>
+                        <a:latin typeface="Codec Pro"/>
+                        <a:ea typeface="+mn-ea"/>
+                        <a:cs typeface="Arial" panose="020B0604020202020204" pitchFamily="34" charset="0"/>
+                      </a:endParaRPr>
+                    </a:p>
+                    <a:p>
+                      <a:pPr marL="700405" lvl="2" indent="-171450" algn="l" defTabSz="914400" rtl="0" eaLnBrk="1" fontAlgn="ctr" latinLnBrk="0" hangingPunct="1">
+                        <a:lnSpc>
+                          <a:spcPct val="100000"/>
+                        </a:lnSpc>
+                        <a:spcBef>
+                          <a:spcPts val="0"/>
+                        </a:spcBef>
+                        <a:spcAft>
+                          <a:spcPts val="0"/>
+                        </a:spcAft>
+                        <a:buClr>
+                          <a:srgbClr val="737373"/>
+                        </a:buClr>
+                        <a:buSzPct val="100000"/>
+                        <a:buFont typeface="Arial" panose="020B0604020202020204" pitchFamily="34" charset="0"/>
+                        <a:buChar char="•"/>
+                      </a:pPr>
+                      <a:r>
+                        <a:rPr lang="en-US" sz="800" b="0" i="0" u="none" strike="noStrike" kern="1200" spc="0">
+                          <a:solidFill>
+                            <a:srgbClr val="585858"/>
+                          </a:solidFill>
+                          <a:effectLst/>
+                          <a:latin typeface="Codec Pro"/>
+                          <a:ea typeface="+mn-ea"/>
+                          <a:cs typeface="Arial" panose="020B0604020202020204" pitchFamily="34" charset="0"/>
+                        </a:rPr>
                         <a:t>Production: stage, LED, sound, lighting, show-calling, standby generator and UPS on critical AV</a:t>
                       </a:r>
                       <a:endParaRPr lang="en-US" sz="800" b="0" i="0" u="none" strike="noStrike" kern="1200" spc="0">
@@ -14899,7 +14979,7 @@
                           <a:ea typeface="+mn-ea"/>
                           <a:cs typeface="Arial" panose="020B0604020202020204" pitchFamily="34" charset="0"/>
                         </a:rPr>
-                        <a:t>Programme: run of show, speaker briefing, capped plenary, Maghrib and Isha prayer breaks</a:t>
+                        <a:t>Programme: impact market, peer circles, keynote dialogues, Council vote, induction, prayer breaks</a:t>
                       </a:r>
                       <a:endParaRPr lang="en-US" sz="800" b="0" i="0" u="none" strike="noStrike" kern="1200" spc="0">
                         <a:solidFill>
@@ -14939,7 +15019,7 @@
                           <a:ea typeface="+mn-ea"/>
                           <a:cs typeface="Arial" panose="020B0604020202020204" pitchFamily="34" charset="0"/>
                         </a:rPr>
-                        <a:t>Registration: online sign-up, digital badge (no advance pick-up), 48-hour reconfirmation</a:t>
+                        <a:t>Registration: online sign-up, digital badge, profile and consent capture, 48-hour reconfirmation</a:t>
                       </a:r>
                       <a:endParaRPr lang="en-US" sz="800" b="0" i="0" u="none" strike="noStrike" kern="1200" spc="0">
                         <a:solidFill>
@@ -15099,46 +15179,6 @@
                           <a:ea typeface="+mn-ea"/>
                           <a:cs typeface="Arial" panose="020B0604020202020204" pitchFamily="34" charset="0"/>
                         </a:rPr>
-                        <a:t>Networking activations and side activities running across the venue</a:t>
-                      </a:r>
-                      <a:endParaRPr lang="en-US" sz="800" b="0" i="0" u="none" strike="noStrike" kern="1200" spc="0">
-                        <a:solidFill>
-                          <a:srgbClr val="585858"/>
-                        </a:solidFill>
-                        <a:effectLst/>
-                        <a:latin typeface="Codec Pro"/>
-                        <a:ea typeface="+mn-ea"/>
-                        <a:cs typeface="Arial" panose="020B0604020202020204" pitchFamily="34" charset="0"/>
-                      </a:endParaRPr>
-                    </a:p>
-                    <a:p>
-                      <a:pPr marL="700405" lvl="2" indent="-171450" algn="l" defTabSz="914400" rtl="0" eaLnBrk="1" fontAlgn="ctr" latinLnBrk="0" hangingPunct="1">
-                        <a:lnSpc>
-                          <a:spcPct val="100000"/>
-                        </a:lnSpc>
-                        <a:spcBef>
-                          <a:spcPts val="0"/>
-                        </a:spcBef>
-                        <a:spcAft>
-                          <a:spcPts val="0"/>
-                        </a:spcAft>
-                        <a:buClr>
-                          <a:srgbClr val="737373"/>
-                        </a:buClr>
-                        <a:buSzPct val="100000"/>
-                        <a:buFont typeface="Arial" panose="020B0604020202020204" pitchFamily="34" charset="0"/>
-                        <a:buChar char="•"/>
-                      </a:pPr>
-                      <a:r>
-                        <a:rPr lang="en-US" sz="800" b="0" i="0" u="none" strike="noStrike" kern="1200" spc="0">
-                          <a:solidFill>
-                            <a:srgbClr val="585858"/>
-                          </a:solidFill>
-                          <a:effectLst/>
-                          <a:latin typeface="Codec Pro"/>
-                          <a:ea typeface="+mn-ea"/>
-                          <a:cs typeface="Arial" panose="020B0604020202020204" pitchFamily="34" charset="0"/>
-                        </a:rPr>
                         <a:t>Support: translation, photography, videography, cleaning, H&amp;S, medical and security</a:t>
                       </a:r>
                       <a:endParaRPr lang="en-US" sz="800" b="0" i="0" u="none" strike="noStrike" kern="1200" spc="0">
@@ -15179,7 +15219,7 @@
                           <a:ea typeface="+mn-ea"/>
                           <a:cs typeface="Arial" panose="020B0604020202020204" pitchFamily="34" charset="0"/>
                         </a:rPr>
-                        <a:t>Post-event: attendee survey and post-event report</a:t>
+                        <a:t>Post-event: personal network cards, attendee survey and post-event report</a:t>
                       </a:r>
                       <a:endParaRPr lang="en-US" sz="800" b="0" i="0" u="none" strike="noStrike" kern="1200" spc="0">
                         <a:solidFill>
@@ -19070,7 +19110,7 @@
                           <a:ea typeface="+mn-ea"/>
                           <a:cs typeface="+mn-cs"/>
                         </a:rPr>
-                        <a:t>Venue contract, agency award and event schedule</a:t>
+                        <a:t>Venue contract, agency award, event schedule and graph data plan</a:t>
                       </a:r>
                     </a:p>
                   </a:txBody>
@@ -19568,7 +19608,7 @@
                           <a:ea typeface="+mn-ea"/>
                           <a:cs typeface="+mn-cs"/>
                         </a:rPr>
-                        <a:t>Registration open and digital badges issued</a:t>
+                        <a:t>Registration, member profiles and digital badges</a:t>
                       </a:r>
                     </a:p>
                     <a:p>
@@ -19604,7 +19644,7 @@
                           <a:ea typeface="+mn-ea"/>
                           <a:cs typeface="+mn-cs"/>
                         </a:rPr>
-                        <a:t>Build, load-in and full technical rehearsal</a:t>
+                        <a:t>Build, load-in, graph integration and rehearsal</a:t>
                       </a:r>
                     </a:p>
                     <a:p>
@@ -20338,7 +20378,7 @@
                           <a:ea typeface="+mn-ea"/>
                           <a:cs typeface="+mn-cs"/>
                         </a:rPr>
-                        <a:t>Post-event report, survey results and vendor closeout</a:t>
+                        <a:t>Post-event report, network metrics and vendor closeout</a:t>
                       </a:r>
                     </a:p>
                   </a:txBody>
@@ -21921,7 +21961,7 @@
                           <a:ea typeface="+mn-ea"/>
                           <a:cs typeface="Arial" panose="020B0604020202020204" pitchFamily="34" charset="0"/>
                         </a:rPr>
-                        <a:t>New venue load-in window and power continuity.</a:t>
+                        <a:t>New venue build, power and network for the graph wall.</a:t>
                       </a:r>
                       <a:endParaRPr lang="en-US" sz="900" b="0" kern="0">
                         <a:solidFill>
@@ -22120,7 +22160,7 @@
                           <a:ea typeface="+mn-ea"/>
                           <a:cs typeface="Arial" panose="020B0604020202020204" pitchFamily="34" charset="0"/>
                         </a:rPr>
-                        <a:t>Site survey, three-day exclusive build access, standby generator in RFP.</a:t>
+                        <a:t>Site survey, exclusive build, standby generator, bonded internet with failover.</a:t>
                       </a:r>
                       <a:endParaRPr lang="en-US" sz="900" b="0" kern="0">
                         <a:solidFill>

--- a/events/sls-annual-assembly-2026/SLS_Annual_Assembly_2026_Event_Charter.pptx
+++ b/events/sls-annual-assembly-2026/SLS_Annual_Assembly_2026_Event_Charter.pptx
@@ -8528,7 +8528,7 @@
                 <a:ea typeface="+mn-ea"/>
                 <a:cs typeface="Codec Pro ExtraBold" pitchFamily="2" charset="0"/>
               </a:rPr>
-              <a:t>SLS Annual Assembly 2026 - Event Information (1/2)</a:t>
+              <a:t>DRAFT: SLS Annual Assembly 2026 - Event Info (1/2)</a:t>
             </a:r>
           </a:p>
         </p:txBody>
@@ -11211,7 +11211,7 @@
                           <a:ea typeface="+mn-ea"/>
                           <a:cs typeface="Arial" panose="020B0604020202020204" pitchFamily="34" charset="0"/>
                         </a:rPr>
-                        <a:t>One-day annual assembly for the full SLS membership. No graduation segment in 2026.</a:t>
+                        <a:t>One-evening annual assembly for the full SLS membership. No graduation segment in 2026.</a:t>
                       </a:r>
                     </a:p>
                     <a:p>
@@ -11242,7 +11242,7 @@
                           <a:ea typeface="+mn-ea"/>
                           <a:cs typeface="Arial" panose="020B0604020202020204" pitchFamily="34" charset="0"/>
                         </a:rPr>
-                        <a:t>Members convene at the Hena Experience Center, Riyadh, for impact showcases, peer advisory circles, keynote dialogues, the Council roadmap and the induction of new members, with an interactive network graph running as the spine of the day.</a:t>
+                        <a:t>Members convene at the Hena Experience Center in Misk City for four hours: recognition of the partners, Council members, Chapter teams and contributors who carried the year, the impact their work produced, and the 2027 agenda. Around 400 of the membership are expected.</a:t>
                       </a:r>
                     </a:p>
                   </a:txBody>
@@ -13603,7 +13603,7 @@
                           <a:ea typeface="+mn-ea"/>
                           <a:cs typeface="Arial" panose="020B0604020202020204" pitchFamily="34" charset="0"/>
                         </a:rPr>
-                        <a:t>14:30 - 21:00</a:t>
+                        <a:t>6:30 - 10:30 PM</a:t>
                       </a:r>
                       <a:endParaRPr lang="en-US" sz="900" b="0" i="0" u="none" strike="noStrike" kern="1200">
                         <a:solidFill>
@@ -14520,7 +14520,7 @@
                           <a:ea typeface="+mn-ea"/>
                           <a:cs typeface="Arial" panose="020B0604020202020204" pitchFamily="34" charset="0"/>
                         </a:rPr>
-                        <a:t>Convene the full SLS membership for one day and turn the society's network into something members actively use.</a:t>
+                        <a:t>Close the SLS year by recognizing the people who carried it, in front of the full membership.</a:t>
                       </a:r>
                     </a:p>
                     <a:p>
@@ -14551,7 +14551,7 @@
                           <a:ea typeface="+mn-ea"/>
                           <a:cs typeface="Arial" panose="020B0604020202020204" pitchFamily="34" charset="0"/>
                         </a:rPr>
-                        <a:t>Make connection the measurable outcome: three or more new introductions logged per member on the network graph, satisfaction of 85% or better (2024: 77%) and 85% of confirmed guests attending (2024: 320 of 468).</a:t>
+                        <a:t>Show what their work produced, open 2027 with members committed to it, and beat the 2024 benchmarks: satisfaction of 85% or better (2024: 77%), 85% of confirmed guests attending (2024: 320 of 468) and three or more introductions logged per member.</a:t>
                       </a:r>
                     </a:p>
                   </a:txBody>
@@ -14779,7 +14779,7 @@
                           <a:ea typeface="+mn-ea"/>
                           <a:cs typeface="Arial" panose="020B0604020202020204" pitchFamily="34" charset="0"/>
                         </a:rPr>
-                        <a:t>Venue: Hena Experience Center, Riyadh - site survey before contract, exclusive access from 18/11</a:t>
+                        <a:t>Venue: Hena Experience Center, Misk City - site survey before contract, access from 18/11</a:t>
                       </a:r>
                       <a:endParaRPr lang="en-US" sz="800" b="0" i="0" u="none" strike="noStrike" kern="1200" spc="0">
                         <a:solidFill>
@@ -14859,7 +14859,7 @@
                           <a:ea typeface="+mn-ea"/>
                           <a:cs typeface="Arial" panose="020B0604020202020204" pitchFamily="34" charset="0"/>
                         </a:rPr>
-                        <a:t>Digital: network graph wall, member app, badge scan to node, live voting, introduction ledger</a:t>
+                        <a:t>Stage and set: built stage, seating for 400, sightlines planned around the permanent exhibition</a:t>
                       </a:r>
                       <a:endParaRPr lang="en-US" sz="800" b="0" i="0" u="none" strike="noStrike" kern="1200" spc="0">
                         <a:solidFill>
@@ -14899,7 +14899,7 @@
                           <a:ea typeface="+mn-ea"/>
                           <a:cs typeface="Arial" panose="020B0604020202020204" pitchFamily="34" charset="0"/>
                         </a:rPr>
-                        <a:t>Connectivity: bonded internet with failover, touch screens, on-site technical support</a:t>
+                        <a:t>Production: LED, sound, lighting, screen content, show-calling, standby generator and UPS</a:t>
                       </a:r>
                       <a:endParaRPr lang="en-US" sz="800" b="0" i="0" u="none" strike="noStrike" kern="1200" spc="0">
                         <a:solidFill>
@@ -14939,7 +14939,7 @@
                           <a:ea typeface="+mn-ea"/>
                           <a:cs typeface="Arial" panose="020B0604020202020204" pitchFamily="34" charset="0"/>
                         </a:rPr>
-                        <a:t>Production: stage, LED, sound, lighting, show-calling, standby generator and UPS on critical AV</a:t>
+                        <a:t>Digital: network graph wall, member app, badge scan, live voting, bonded internet with failover</a:t>
                       </a:r>
                       <a:endParaRPr lang="en-US" sz="800" b="0" i="0" u="none" strike="noStrike" kern="1200" spc="0">
                         <a:solidFill>
@@ -14979,7 +14979,7 @@
                           <a:ea typeface="+mn-ea"/>
                           <a:cs typeface="Arial" panose="020B0604020202020204" pitchFamily="34" charset="0"/>
                         </a:rPr>
-                        <a:t>Programme: impact market, peer circles, keynote dialogues, Council vote, induction, prayer breaks</a:t>
+                        <a:t>Program: run of show, speaker briefing, Isha prayer inside the arrival window</a:t>
                       </a:r>
                       <a:endParaRPr lang="en-US" sz="800" b="0" i="0" u="none" strike="noStrike" kern="1200" spc="0">
                         <a:solidFill>
@@ -15059,7 +15059,7 @@
                           <a:ea typeface="+mn-ea"/>
                           <a:cs typeface="Arial" panose="020B0604020202020204" pitchFamily="34" charset="0"/>
                         </a:rPr>
-                        <a:t>Branding: internal and outer signage, wayfinding, photo drop</a:t>
+                        <a:t>Recognition: Wall of the Year, peer nomination flow, honoree evidence, photo drop, letters</a:t>
                       </a:r>
                       <a:endParaRPr lang="en-US" sz="800" b="0" i="0" u="none" strike="noStrike" kern="1200" spc="0">
                         <a:solidFill>
@@ -15099,7 +15099,7 @@
                           <a:ea typeface="+mn-ea"/>
                           <a:cs typeface="Arial" panose="020B0604020202020204" pitchFamily="34" charset="0"/>
                         </a:rPr>
-                        <a:t>Guest experience: protocol, seating, valet, traffic and parking, people of determination journey</a:t>
+                        <a:t>Guest experience: protocol, seating, signage and wayfinding, valet, parking, accessibility</a:t>
                       </a:r>
                       <a:endParaRPr lang="en-US" sz="800" b="0" i="0" u="none" strike="noStrike" kern="1200" spc="0">
                         <a:solidFill>
@@ -15139,7 +15139,7 @@
                           <a:ea typeface="+mn-ea"/>
                           <a:cs typeface="Arial" panose="020B0604020202020204" pitchFamily="34" charset="0"/>
                         </a:rPr>
-                        <a:t>F&amp;B: catering scaled to reconfirmed numbers, staged release, live cooking and pass-around</a:t>
+                        <a:t>F&amp;B: dinner scaled to reconfirmed numbers, staged release, live cooking and pass-around</a:t>
                       </a:r>
                       <a:endParaRPr lang="en-US" sz="800" b="0" i="0" u="none" strike="noStrike" kern="1200" spc="0">
                         <a:solidFill>
@@ -16334,7 +16334,7 @@
                 <a:latin typeface="Codec Pro ExtraBold" pitchFamily="2" charset="0"/>
                 <a:cs typeface="Codec Pro ExtraBold" pitchFamily="2" charset="0"/>
               </a:rPr>
-              <a:t>SLS Annual Assembly 2026 - Event Information (2/2)</a:t>
+              <a:t>DRAFT: SLS Annual Assembly 2026 - Event Info (2/2)</a:t>
             </a:r>
           </a:p>
           <a:p>
@@ -19110,7 +19110,7 @@
                           <a:ea typeface="+mn-ea"/>
                           <a:cs typeface="+mn-cs"/>
                         </a:rPr>
-                        <a:t>Venue contract, agency award, event schedule and graph data plan</a:t>
+                        <a:t>Venue contract, agency award, run of show, graph and recognition data</a:t>
                       </a:r>
                     </a:p>
                   </a:txBody>
@@ -19644,7 +19644,7 @@
                           <a:ea typeface="+mn-ea"/>
                           <a:cs typeface="+mn-cs"/>
                         </a:rPr>
-                        <a:t>Build, load-in, graph integration and rehearsal</a:t>
+                        <a:t>Build, stage, graph integration and rehearsal</a:t>
                       </a:r>
                     </a:p>
                     <a:p>
@@ -21961,7 +21961,7 @@
                           <a:ea typeface="+mn-ea"/>
                           <a:cs typeface="Arial" panose="020B0604020202020204" pitchFamily="34" charset="0"/>
                         </a:rPr>
-                        <a:t>New venue build, power and network for the graph wall.</a:t>
+                        <a:t>Building a stage for 400 inside a live exhibition space.</a:t>
                       </a:r>
                       <a:endParaRPr lang="en-US" sz="900" b="0" kern="0">
                         <a:solidFill>
@@ -22160,7 +22160,7 @@
                           <a:ea typeface="+mn-ea"/>
                           <a:cs typeface="Arial" panose="020B0604020202020204" pitchFamily="34" charset="0"/>
                         </a:rPr>
-                        <a:t>Site survey, exclusive build, standby generator, bonded internet with failover.</a:t>
+                        <a:t>Site survey before signature; exclusive build access; standby power and network.</a:t>
                       </a:r>
                       <a:endParaRPr lang="en-US" sz="900" b="0" kern="0">
                         <a:solidFill>
